--- a/Mall Customer Segmentation.pptx
+++ b/Mall Customer Segmentation.pptx
@@ -115,6 +115,11 @@
       </a:defRPr>
     </a:lvl9pPr>
   </p:defaultTextStyle>
+  <p:extLst>
+    <p:ext uri="{EFAFB233-063F-42B5-8137-9DF3F51BA10A}">
+      <p15:sldGuideLst xmlns:p15="http://schemas.microsoft.com/office/powerpoint/2012/main"/>
+    </p:ext>
+  </p:extLst>
 </p:presentation>
 </file>
 
@@ -200,7 +205,7 @@
           <a:p>
             <a:fld id="{0166BCD1-4FD2-42C8-8825-83F65CF86F2B}" type="datetimeFigureOut">
               <a:rPr lang="el-GR" smtClean="0"/>
-              <a:t>7/3/2026</a:t>
+              <a:t>7/3/26</a:t>
             </a:fld>
             <a:endParaRPr lang="el-GR"/>
           </a:p>
@@ -1625,7 +1630,7 @@
           <a:p>
             <a:fld id="{A35F451F-F832-44B4-95D5-E35B2EB949AA}" type="datetimeFigureOut">
               <a:rPr lang="el-GR" smtClean="0"/>
-              <a:t>7/3/2026</a:t>
+              <a:t>7/3/26</a:t>
             </a:fld>
             <a:endParaRPr lang="el-GR"/>
           </a:p>
@@ -1825,7 +1830,7 @@
           <a:p>
             <a:fld id="{A35F451F-F832-44B4-95D5-E35B2EB949AA}" type="datetimeFigureOut">
               <a:rPr lang="el-GR" smtClean="0"/>
-              <a:t>7/3/2026</a:t>
+              <a:t>7/3/26</a:t>
             </a:fld>
             <a:endParaRPr lang="el-GR"/>
           </a:p>
@@ -2035,7 +2040,7 @@
           <a:p>
             <a:fld id="{A35F451F-F832-44B4-95D5-E35B2EB949AA}" type="datetimeFigureOut">
               <a:rPr lang="el-GR" smtClean="0"/>
-              <a:t>7/3/2026</a:t>
+              <a:t>7/3/26</a:t>
             </a:fld>
             <a:endParaRPr lang="el-GR"/>
           </a:p>
@@ -2235,7 +2240,7 @@
           <a:p>
             <a:fld id="{A35F451F-F832-44B4-95D5-E35B2EB949AA}" type="datetimeFigureOut">
               <a:rPr lang="el-GR" smtClean="0"/>
-              <a:t>7/3/2026</a:t>
+              <a:t>7/3/26</a:t>
             </a:fld>
             <a:endParaRPr lang="el-GR"/>
           </a:p>
@@ -2511,7 +2516,7 @@
           <a:p>
             <a:fld id="{A35F451F-F832-44B4-95D5-E35B2EB949AA}" type="datetimeFigureOut">
               <a:rPr lang="el-GR" smtClean="0"/>
-              <a:t>7/3/2026</a:t>
+              <a:t>7/3/26</a:t>
             </a:fld>
             <a:endParaRPr lang="el-GR"/>
           </a:p>
@@ -2779,7 +2784,7 @@
           <a:p>
             <a:fld id="{A35F451F-F832-44B4-95D5-E35B2EB949AA}" type="datetimeFigureOut">
               <a:rPr lang="el-GR" smtClean="0"/>
-              <a:t>7/3/2026</a:t>
+              <a:t>7/3/26</a:t>
             </a:fld>
             <a:endParaRPr lang="el-GR"/>
           </a:p>
@@ -3194,7 +3199,7 @@
           <a:p>
             <a:fld id="{A35F451F-F832-44B4-95D5-E35B2EB949AA}" type="datetimeFigureOut">
               <a:rPr lang="el-GR" smtClean="0"/>
-              <a:t>7/3/2026</a:t>
+              <a:t>7/3/26</a:t>
             </a:fld>
             <a:endParaRPr lang="el-GR"/>
           </a:p>
@@ -3336,7 +3341,7 @@
           <a:p>
             <a:fld id="{A35F451F-F832-44B4-95D5-E35B2EB949AA}" type="datetimeFigureOut">
               <a:rPr lang="el-GR" smtClean="0"/>
-              <a:t>7/3/2026</a:t>
+              <a:t>7/3/26</a:t>
             </a:fld>
             <a:endParaRPr lang="el-GR"/>
           </a:p>
@@ -3449,7 +3454,7 @@
           <a:p>
             <a:fld id="{A35F451F-F832-44B4-95D5-E35B2EB949AA}" type="datetimeFigureOut">
               <a:rPr lang="el-GR" smtClean="0"/>
-              <a:t>7/3/2026</a:t>
+              <a:t>7/3/26</a:t>
             </a:fld>
             <a:endParaRPr lang="el-GR"/>
           </a:p>
@@ -3762,7 +3767,7 @@
           <a:p>
             <a:fld id="{A35F451F-F832-44B4-95D5-E35B2EB949AA}" type="datetimeFigureOut">
               <a:rPr lang="el-GR" smtClean="0"/>
-              <a:t>7/3/2026</a:t>
+              <a:t>7/3/26</a:t>
             </a:fld>
             <a:endParaRPr lang="el-GR"/>
           </a:p>
@@ -4051,7 +4056,7 @@
           <a:p>
             <a:fld id="{A35F451F-F832-44B4-95D5-E35B2EB949AA}" type="datetimeFigureOut">
               <a:rPr lang="el-GR" smtClean="0"/>
-              <a:t>7/3/2026</a:t>
+              <a:t>7/3/26</a:t>
             </a:fld>
             <a:endParaRPr lang="el-GR"/>
           </a:p>
@@ -4360,7 +4365,7 @@
           <a:p>
             <a:fld id="{A35F451F-F832-44B4-95D5-E35B2EB949AA}" type="datetimeFigureOut">
               <a:rPr lang="el-GR" smtClean="0"/>
-              <a:t>7/3/2026</a:t>
+              <a:t>7/3/26</a:t>
             </a:fld>
             <a:endParaRPr lang="el-GR"/>
           </a:p>
@@ -8930,7 +8935,7 @@
                   <a:schemeClr val="bg1"/>
                 </a:solidFill>
               </a:rPr>
-              <a:t>Gender</a:t>
+              <a:t>Spending Score</a:t>
             </a:r>
             <a:endParaRPr lang="el-GR" sz="1500" b="1" dirty="0">
               <a:solidFill>
@@ -9032,7 +9037,7 @@
                   <a:schemeClr val="bg1"/>
                 </a:solidFill>
               </a:rPr>
-              <a:t>Gender</a:t>
+              <a:t>Annual Income</a:t>
             </a:r>
             <a:endParaRPr lang="el-GR" sz="1500" b="1" dirty="0">
               <a:solidFill>
